--- a/site/clases/parte-1-machine-learning-clasico/092-pca-proyeccion-varianza-explicada-incremental-randomized-kernel/clase-092-pca-proyeccion-varianza-explicada-incremental-randomized-kernel-presentacion.pptx
+++ b/site/clases/parte-1-machine-learning-clasico/092-pca-proyeccion-varianza-explicada-incremental-randomized-kernel/clase-092-pca-proyeccion-varianza-explicada-incremental-randomized-kernel-presentacion.pptx
@@ -3272,7 +3272,7 @@
                 </a:solidFill>
                 <a:latin typeface="Segoe UI"/>
               </a:rPr>
-              <a:t>Parte: 1 — Machine Learning Clásico · Fuente: Géron, cap. 8.  Duración estimada: 80 min.</a:t>
+              <a:t>Parte: 1 — Machine Learning Clásico · Fuente: Géron, cap. 8.  Duración estimada: 80 min. · Nivel: Intermedio</a:t>
             </a:r>
           </a:p>
         </p:txBody>
@@ -3581,7 +3581,7 @@
                 </a:solidFill>
                 <a:latin typeface="Segoe UI"/>
               </a:rPr>
-              <a:t>Parte: 1 — Machine Learning Clásico · Fuente: Géron, cap. 8.  Duración estimada: 80 min.</a:t>
+              <a:t>Parte: 1 — Machine Learning Clásico · Fuente: Géron, cap. 8.  Duración estimada: 80 min. · Nivel: Intermedio</a:t>
             </a:r>
           </a:p>
         </p:txBody>
@@ -4845,7 +4845,7 @@
                 </a:solidFill>
                 <a:latin typeface="Segoe UI"/>
               </a:rPr>
-              <a:t>Primer bloque ejecutable del notebook.</a:t>
+              <a:t>Estandarizamos y proyectamos. components_ son combinaciones lineales ortonormales de las features originales.</a:t>
             </a:r>
           </a:p>
         </p:txBody>
@@ -4932,7 +4932,292 @@
                 </a:solidFill>
                 <a:latin typeface="Courier New"/>
               </a:rPr>
-              <a:t># Imports y configuración inicial</a:t>
+              <a:t>import numpy as np</a:t>
+            </a:r>
+          </a:p>
+          <a:p>
+            <a:pPr>
+              <a:defRPr sz="1200" b="0">
+                <a:solidFill>
+                  <a:srgbClr val="F8FAFC"/>
+                </a:solidFill>
+                <a:latin typeface="Courier New"/>
+              </a:defRPr>
+            </a:pPr>
+            <a:r>
+              <a:rPr sz="1200" b="0">
+                <a:solidFill>
+                  <a:srgbClr val="F8FAFC"/>
+                </a:solidFill>
+                <a:latin typeface="Courier New"/>
+              </a:rPr>
+              <a:t>import matplotlib.pyplot as plt</a:t>
+            </a:r>
+          </a:p>
+          <a:p>
+            <a:pPr>
+              <a:defRPr sz="1200" b="0">
+                <a:solidFill>
+                  <a:srgbClr val="F8FAFC"/>
+                </a:solidFill>
+                <a:latin typeface="Courier New"/>
+              </a:defRPr>
+            </a:pPr>
+            <a:r>
+              <a:rPr sz="1200" b="0">
+                <a:solidFill>
+                  <a:srgbClr val="F8FAFC"/>
+                </a:solidFill>
+                <a:latin typeface="Courier New"/>
+              </a:rPr>
+              <a:t>from sklearn.datasets import load_digits</a:t>
+            </a:r>
+          </a:p>
+          <a:p>
+            <a:pPr>
+              <a:defRPr sz="1200" b="0">
+                <a:solidFill>
+                  <a:srgbClr val="F8FAFC"/>
+                </a:solidFill>
+                <a:latin typeface="Courier New"/>
+              </a:defRPr>
+            </a:pPr>
+            <a:r>
+              <a:rPr sz="1200" b="0">
+                <a:solidFill>
+                  <a:srgbClr val="F8FAFC"/>
+                </a:solidFill>
+                <a:latin typeface="Courier New"/>
+              </a:rPr>
+              <a:t>from sklearn.preprocessing import StandardScaler</a:t>
+            </a:r>
+          </a:p>
+          <a:p>
+            <a:pPr>
+              <a:defRPr sz="1200" b="0">
+                <a:solidFill>
+                  <a:srgbClr val="F8FAFC"/>
+                </a:solidFill>
+                <a:latin typeface="Courier New"/>
+              </a:defRPr>
+            </a:pPr>
+            <a:r>
+              <a:rPr sz="1200" b="0">
+                <a:solidFill>
+                  <a:srgbClr val="F8FAFC"/>
+                </a:solidFill>
+                <a:latin typeface="Courier New"/>
+              </a:rPr>
+              <a:t>from sklearn.decomposition import PCA</a:t>
+            </a:r>
+          </a:p>
+          <a:p>
+            <a:pPr>
+              <a:defRPr sz="1200" b="0">
+                <a:solidFill>
+                  <a:srgbClr val="F8FAFC"/>
+                </a:solidFill>
+                <a:latin typeface="Courier New"/>
+              </a:defRPr>
+            </a:pPr>
+            <a:r>
+              <a:rPr sz="1200" b="0">
+                <a:solidFill>
+                  <a:srgbClr val="F8FAFC"/>
+                </a:solidFill>
+                <a:latin typeface="Courier New"/>
+              </a:rPr>
+              <a:t> </a:t>
+            </a:r>
+          </a:p>
+          <a:p>
+            <a:pPr>
+              <a:defRPr sz="1200" b="0">
+                <a:solidFill>
+                  <a:srgbClr val="F8FAFC"/>
+                </a:solidFill>
+                <a:latin typeface="Courier New"/>
+              </a:defRPr>
+            </a:pPr>
+            <a:r>
+              <a:rPr sz="1200" b="0">
+                <a:solidFill>
+                  <a:srgbClr val="F8FAFC"/>
+                </a:solidFill>
+                <a:latin typeface="Courier New"/>
+              </a:rPr>
+              <a:t>np.random.seed(42)</a:t>
+            </a:r>
+          </a:p>
+          <a:p>
+            <a:pPr>
+              <a:defRPr sz="1200" b="0">
+                <a:solidFill>
+                  <a:srgbClr val="F8FAFC"/>
+                </a:solidFill>
+                <a:latin typeface="Courier New"/>
+              </a:defRPr>
+            </a:pPr>
+            <a:r>
+              <a:rPr sz="1200" b="0">
+                <a:solidFill>
+                  <a:srgbClr val="F8FAFC"/>
+                </a:solidFill>
+                <a:latin typeface="Courier New"/>
+              </a:rPr>
+              <a:t>X = load_digits().data</a:t>
+            </a:r>
+          </a:p>
+          <a:p>
+            <a:pPr>
+              <a:defRPr sz="1200" b="0">
+                <a:solidFill>
+                  <a:srgbClr val="F8FAFC"/>
+                </a:solidFill>
+                <a:latin typeface="Courier New"/>
+              </a:defRPr>
+            </a:pPr>
+            <a:r>
+              <a:rPr sz="1200" b="0">
+                <a:solidFill>
+                  <a:srgbClr val="F8FAFC"/>
+                </a:solidFill>
+                <a:latin typeface="Courier New"/>
+              </a:rPr>
+              <a:t>y = load_digits().target</a:t>
+            </a:r>
+          </a:p>
+          <a:p>
+            <a:pPr>
+              <a:defRPr sz="1200" b="0">
+                <a:solidFill>
+                  <a:srgbClr val="F8FAFC"/>
+                </a:solidFill>
+                <a:latin typeface="Courier New"/>
+              </a:defRPr>
+            </a:pPr>
+            <a:r>
+              <a:rPr sz="1200" b="0">
+                <a:solidFill>
+                  <a:srgbClr val="F8FAFC"/>
+                </a:solidFill>
+                <a:latin typeface="Courier New"/>
+              </a:rPr>
+              <a:t>Xs = StandardScaler().fit_transform(X)</a:t>
+            </a:r>
+          </a:p>
+          <a:p>
+            <a:pPr>
+              <a:defRPr sz="1200" b="0">
+                <a:solidFill>
+                  <a:srgbClr val="F8FAFC"/>
+                </a:solidFill>
+                <a:latin typeface="Courier New"/>
+              </a:defRPr>
+            </a:pPr>
+            <a:r>
+              <a:rPr sz="1200" b="0">
+                <a:solidFill>
+                  <a:srgbClr val="F8FAFC"/>
+                </a:solidFill>
+                <a:latin typeface="Courier New"/>
+              </a:rPr>
+              <a:t> </a:t>
+            </a:r>
+          </a:p>
+          <a:p>
+            <a:pPr>
+              <a:defRPr sz="1200" b="0">
+                <a:solidFill>
+                  <a:srgbClr val="F8FAFC"/>
+                </a:solidFill>
+                <a:latin typeface="Courier New"/>
+              </a:defRPr>
+            </a:pPr>
+            <a:r>
+              <a:rPr sz="1200" b="0">
+                <a:solidFill>
+                  <a:srgbClr val="F8FAFC"/>
+                </a:solidFill>
+                <a:latin typeface="Courier New"/>
+              </a:rPr>
+              <a:t>pca = PCA(random_state=42).fit(Xs)</a:t>
+            </a:r>
+          </a:p>
+          <a:p>
+            <a:pPr>
+              <a:defRPr sz="1200" b="0">
+                <a:solidFill>
+                  <a:srgbClr val="F8FAFC"/>
+                </a:solidFill>
+                <a:latin typeface="Courier New"/>
+              </a:defRPr>
+            </a:pPr>
+            <a:r>
+              <a:rPr sz="1200" b="0">
+                <a:solidFill>
+                  <a:srgbClr val="F8FAFC"/>
+                </a:solidFill>
+                <a:latin typeface="Courier New"/>
+              </a:rPr>
+              <a:t>print("X:", Xs.shape, "| components_:", pca.components_.shape)</a:t>
+            </a:r>
+          </a:p>
+          <a:p>
+            <a:pPr>
+              <a:defRPr sz="1200" b="0">
+                <a:solidFill>
+                  <a:srgbClr val="F8FAFC"/>
+                </a:solidFill>
+                <a:latin typeface="Courier New"/>
+              </a:defRPr>
+            </a:pPr>
+            <a:r>
+              <a:rPr sz="1200" b="0">
+                <a:solidFill>
+                  <a:srgbClr val="F8FAFC"/>
+                </a:solidFill>
+                <a:latin typeface="Courier New"/>
+              </a:rPr>
+              <a:t>print("primeros 5 explained_variance_ratio_:", pca.explained_variance_ratio_[:5].round(4))</a:t>
+            </a:r>
+          </a:p>
+          <a:p>
+            <a:pPr>
+              <a:defRPr sz="1200" b="0">
+                <a:solidFill>
+                  <a:srgbClr val="F8FAFC"/>
+                </a:solidFill>
+                <a:latin typeface="Courier New"/>
+              </a:defRPr>
+            </a:pPr>
+            <a:r>
+              <a:rPr sz="1200" b="0">
+                <a:solidFill>
+                  <a:srgbClr val="F8FAFC"/>
+                </a:solidFill>
+                <a:latin typeface="Courier New"/>
+              </a:rPr>
+              <a:t>assert pca.explained_variance_ratio_[0] &gt;= pca.explained_variance_ratio_[1]</a:t>
+            </a:r>
+          </a:p>
+          <a:p>
+            <a:pPr>
+              <a:defRPr sz="1200" b="0">
+                <a:solidFill>
+                  <a:srgbClr val="F8FAFC"/>
+                </a:solidFill>
+                <a:latin typeface="Courier New"/>
+              </a:defRPr>
+            </a:pPr>
+            <a:r>
+              <a:rPr sz="1200" b="0">
+                <a:solidFill>
+                  <a:srgbClr val="F8FAFC"/>
+                </a:solidFill>
+                <a:latin typeface="Courier New"/>
+              </a:rPr>
+              <a:t>print("los ratios vienen ordenados de mayor a menor: OK")</a:t>
             </a:r>
           </a:p>
         </p:txBody>
